--- a/assets/powerpoints/module-procedure/A3-le-vocabulaire-de-bureau.pptx
+++ b/assets/powerpoints/module-procedure/A3-le-vocabulaire-de-bureau.pptx
@@ -4720,7 +4720,7 @@
                 </a:solidFill>
                 <a:latin typeface="Verdana"/>
               </a:rPr>
-              <a:t>SÉANCE A3  ·  MODULE 4</a:t>
+              <a:t>SÉANCE A3  ·  MODULE 5</a:t>
             </a:r>
           </a:p>
         </p:txBody>

--- a/assets/powerpoints/module-procedure/A3-le-vocabulaire-de-bureau.pptx
+++ b/assets/powerpoints/module-procedure/A3-le-vocabulaire-de-bureau.pptx
@@ -4716,7 +4716,7 @@
             <a:r>
               <a:rPr sz="1300" b="1" i="0" spc="156">
                 <a:solidFill>
-                  <a:srgbClr val="166534"/>
+                  <a:srgbClr val="A5335F"/>
                 </a:solidFill>
                 <a:latin typeface="Verdana"/>
               </a:rPr>
@@ -5056,7 +5056,7 @@
             <a:r>
               <a:rPr sz="1300" b="1" i="0" spc="156">
                 <a:solidFill>
-                  <a:srgbClr val="166534"/>
+                  <a:srgbClr val="A5335F"/>
                 </a:solidFill>
                 <a:latin typeface="Verdana"/>
               </a:rPr>
@@ -5206,7 +5206,7 @@
             </a:avLst>
           </a:prstGeom>
           <a:solidFill>
-            <a:srgbClr val="E3F1E7"/>
+            <a:srgbClr val="FCE9F0"/>
           </a:solidFill>
           <a:ln>
             <a:noFill/>
@@ -5263,7 +5263,7 @@
             <a:r>
               <a:rPr sz="1500" b="1" i="0">
                 <a:solidFill>
-                  <a:srgbClr val="166534"/>
+                  <a:srgbClr val="A5335F"/>
                 </a:solidFill>
                 <a:latin typeface="Verdana"/>
               </a:rPr>
@@ -5374,7 +5374,7 @@
             </a:avLst>
           </a:prstGeom>
           <a:solidFill>
-            <a:srgbClr val="E3F1E7"/>
+            <a:srgbClr val="FCE9F0"/>
           </a:solidFill>
           <a:ln>
             <a:noFill/>
@@ -5431,7 +5431,7 @@
             <a:r>
               <a:rPr sz="1500" b="1" i="0">
                 <a:solidFill>
-                  <a:srgbClr val="166534"/>
+                  <a:srgbClr val="A5335F"/>
                 </a:solidFill>
                 <a:latin typeface="Verdana"/>
               </a:rPr>
@@ -5542,7 +5542,7 @@
             </a:avLst>
           </a:prstGeom>
           <a:solidFill>
-            <a:srgbClr val="E3F1E7"/>
+            <a:srgbClr val="FCE9F0"/>
           </a:solidFill>
           <a:ln>
             <a:noFill/>
@@ -5599,7 +5599,7 @@
             <a:r>
               <a:rPr sz="1500" b="1" i="0">
                 <a:solidFill>
-                  <a:srgbClr val="166534"/>
+                  <a:srgbClr val="A5335F"/>
                 </a:solidFill>
                 <a:latin typeface="Verdana"/>
               </a:rPr>
@@ -5710,7 +5710,7 @@
             </a:avLst>
           </a:prstGeom>
           <a:solidFill>
-            <a:srgbClr val="E3F1E7"/>
+            <a:srgbClr val="FCE9F0"/>
           </a:solidFill>
           <a:ln>
             <a:noFill/>
@@ -5767,7 +5767,7 @@
             <a:r>
               <a:rPr sz="1500" b="1" i="0">
                 <a:solidFill>
-                  <a:srgbClr val="166534"/>
+                  <a:srgbClr val="A5335F"/>
                 </a:solidFill>
                 <a:latin typeface="Verdana"/>
               </a:rPr>
@@ -5878,7 +5878,7 @@
             </a:avLst>
           </a:prstGeom>
           <a:solidFill>
-            <a:srgbClr val="E3F1E7"/>
+            <a:srgbClr val="FCE9F0"/>
           </a:solidFill>
           <a:ln>
             <a:noFill/>
@@ -5935,7 +5935,7 @@
             <a:r>
               <a:rPr sz="1500" b="1" i="0">
                 <a:solidFill>
-                  <a:srgbClr val="166534"/>
+                  <a:srgbClr val="A5335F"/>
                 </a:solidFill>
                 <a:latin typeface="Verdana"/>
               </a:rPr>
@@ -6046,7 +6046,7 @@
             </a:avLst>
           </a:prstGeom>
           <a:solidFill>
-            <a:srgbClr val="E3F1E7"/>
+            <a:srgbClr val="FCE9F0"/>
           </a:solidFill>
           <a:ln>
             <a:noFill/>
@@ -6103,7 +6103,7 @@
             <a:r>
               <a:rPr sz="1500" b="1" i="0">
                 <a:solidFill>
-                  <a:srgbClr val="166534"/>
+                  <a:srgbClr val="A5335F"/>
                 </a:solidFill>
                 <a:latin typeface="Verdana"/>
               </a:rPr>
@@ -6319,7 +6319,7 @@
             <a:r>
               <a:rPr sz="1300" b="1" i="0" spc="156">
                 <a:solidFill>
-                  <a:srgbClr val="166534"/>
+                  <a:srgbClr val="A5335F"/>
                 </a:solidFill>
                 <a:latin typeface="Verdana"/>
               </a:rPr>
@@ -6469,7 +6469,7 @@
             </a:avLst>
           </a:prstGeom>
           <a:solidFill>
-            <a:srgbClr val="E3F1E7"/>
+            <a:srgbClr val="FCE9F0"/>
           </a:solidFill>
           <a:ln>
             <a:noFill/>
@@ -6526,7 +6526,7 @@
             <a:r>
               <a:rPr sz="1500" b="1" i="0">
                 <a:solidFill>
-                  <a:srgbClr val="166534"/>
+                  <a:srgbClr val="A5335F"/>
                 </a:solidFill>
                 <a:latin typeface="Verdana"/>
               </a:rPr>
@@ -6646,7 +6646,7 @@
             </a:avLst>
           </a:prstGeom>
           <a:solidFill>
-            <a:srgbClr val="E3F1E7"/>
+            <a:srgbClr val="FCE9F0"/>
           </a:solidFill>
           <a:ln>
             <a:noFill/>
@@ -6703,7 +6703,7 @@
             <a:r>
               <a:rPr sz="1500" b="1" i="0">
                 <a:solidFill>
-                  <a:srgbClr val="166534"/>
+                  <a:srgbClr val="A5335F"/>
                 </a:solidFill>
                 <a:latin typeface="Verdana"/>
               </a:rPr>
@@ -6823,7 +6823,7 @@
             </a:avLst>
           </a:prstGeom>
           <a:solidFill>
-            <a:srgbClr val="E3F1E7"/>
+            <a:srgbClr val="FCE9F0"/>
           </a:solidFill>
           <a:ln>
             <a:noFill/>
@@ -6880,7 +6880,7 @@
             <a:r>
               <a:rPr sz="1500" b="1" i="0">
                 <a:solidFill>
-                  <a:srgbClr val="166534"/>
+                  <a:srgbClr val="A5335F"/>
                 </a:solidFill>
                 <a:latin typeface="Verdana"/>
               </a:rPr>
@@ -7000,7 +7000,7 @@
             </a:avLst>
           </a:prstGeom>
           <a:solidFill>
-            <a:srgbClr val="E3F1E7"/>
+            <a:srgbClr val="FCE9F0"/>
           </a:solidFill>
           <a:ln>
             <a:noFill/>
@@ -7057,7 +7057,7 @@
             <a:r>
               <a:rPr sz="1500" b="1" i="0">
                 <a:solidFill>
-                  <a:srgbClr val="166534"/>
+                  <a:srgbClr val="A5335F"/>
                 </a:solidFill>
                 <a:latin typeface="Verdana"/>
               </a:rPr>
@@ -7177,7 +7177,7 @@
             </a:avLst>
           </a:prstGeom>
           <a:solidFill>
-            <a:srgbClr val="E3F1E7"/>
+            <a:srgbClr val="FCE9F0"/>
           </a:solidFill>
           <a:ln>
             <a:noFill/>
@@ -7234,7 +7234,7 @@
             <a:r>
               <a:rPr sz="1500" b="1" i="0">
                 <a:solidFill>
-                  <a:srgbClr val="166534"/>
+                  <a:srgbClr val="A5335F"/>
                 </a:solidFill>
                 <a:latin typeface="Verdana"/>
               </a:rPr>
@@ -7354,7 +7354,7 @@
             </a:avLst>
           </a:prstGeom>
           <a:solidFill>
-            <a:srgbClr val="E3F1E7"/>
+            <a:srgbClr val="FCE9F0"/>
           </a:solidFill>
           <a:ln>
             <a:noFill/>
@@ -7411,7 +7411,7 @@
             <a:r>
               <a:rPr sz="1500" b="1" i="0">
                 <a:solidFill>
-                  <a:srgbClr val="166534"/>
+                  <a:srgbClr val="A5335F"/>
                 </a:solidFill>
                 <a:latin typeface="Verdana"/>
               </a:rPr>
@@ -7636,7 +7636,7 @@
             <a:r>
               <a:rPr sz="1300" b="1" i="0" spc="156">
                 <a:solidFill>
-                  <a:srgbClr val="166534"/>
+                  <a:srgbClr val="A5335F"/>
                 </a:solidFill>
                 <a:latin typeface="Verdana"/>
               </a:rPr>
@@ -7786,7 +7786,7 @@
             </a:avLst>
           </a:prstGeom>
           <a:solidFill>
-            <a:srgbClr val="E3F1E7"/>
+            <a:srgbClr val="FCE9F0"/>
           </a:solidFill>
           <a:ln>
             <a:noFill/>
@@ -7843,7 +7843,7 @@
             <a:r>
               <a:rPr sz="1500" b="1" i="0">
                 <a:solidFill>
-                  <a:srgbClr val="166534"/>
+                  <a:srgbClr val="A5335F"/>
                 </a:solidFill>
                 <a:latin typeface="Verdana"/>
               </a:rPr>
@@ -7954,7 +7954,7 @@
             </a:avLst>
           </a:prstGeom>
           <a:solidFill>
-            <a:srgbClr val="E3F1E7"/>
+            <a:srgbClr val="FCE9F0"/>
           </a:solidFill>
           <a:ln>
             <a:noFill/>
@@ -8011,7 +8011,7 @@
             <a:r>
               <a:rPr sz="1500" b="1" i="0">
                 <a:solidFill>
-                  <a:srgbClr val="166534"/>
+                  <a:srgbClr val="A5335F"/>
                 </a:solidFill>
                 <a:latin typeface="Verdana"/>
               </a:rPr>
@@ -8122,7 +8122,7 @@
             </a:avLst>
           </a:prstGeom>
           <a:solidFill>
-            <a:srgbClr val="E3F1E7"/>
+            <a:srgbClr val="FCE9F0"/>
           </a:solidFill>
           <a:ln>
             <a:noFill/>
@@ -8179,7 +8179,7 @@
             <a:r>
               <a:rPr sz="1500" b="1" i="0">
                 <a:solidFill>
-                  <a:srgbClr val="166534"/>
+                  <a:srgbClr val="A5335F"/>
                 </a:solidFill>
                 <a:latin typeface="Verdana"/>
               </a:rPr>
@@ -8395,7 +8395,7 @@
             <a:r>
               <a:rPr sz="1300" b="1" i="0" spc="156">
                 <a:solidFill>
-                  <a:srgbClr val="166534"/>
+                  <a:srgbClr val="A5335F"/>
                 </a:solidFill>
                 <a:latin typeface="Verdana"/>
               </a:rPr>
@@ -8545,7 +8545,7 @@
             </a:avLst>
           </a:prstGeom>
           <a:solidFill>
-            <a:srgbClr val="E3F1E7"/>
+            <a:srgbClr val="FCE9F0"/>
           </a:solidFill>
           <a:ln>
             <a:noFill/>
@@ -8602,7 +8602,7 @@
             <a:r>
               <a:rPr sz="1500" b="1" i="0">
                 <a:solidFill>
-                  <a:srgbClr val="166534"/>
+                  <a:srgbClr val="A5335F"/>
                 </a:solidFill>
                 <a:latin typeface="Verdana"/>
               </a:rPr>
@@ -8722,7 +8722,7 @@
             </a:avLst>
           </a:prstGeom>
           <a:solidFill>
-            <a:srgbClr val="E3F1E7"/>
+            <a:srgbClr val="FCE9F0"/>
           </a:solidFill>
           <a:ln>
             <a:noFill/>
@@ -8779,7 +8779,7 @@
             <a:r>
               <a:rPr sz="1500" b="1" i="0">
                 <a:solidFill>
-                  <a:srgbClr val="166534"/>
+                  <a:srgbClr val="A5335F"/>
                 </a:solidFill>
                 <a:latin typeface="Verdana"/>
               </a:rPr>
@@ -8899,7 +8899,7 @@
             </a:avLst>
           </a:prstGeom>
           <a:solidFill>
-            <a:srgbClr val="E3F1E7"/>
+            <a:srgbClr val="FCE9F0"/>
           </a:solidFill>
           <a:ln>
             <a:noFill/>
@@ -8956,7 +8956,7 @@
             <a:r>
               <a:rPr sz="1500" b="1" i="0">
                 <a:solidFill>
-                  <a:srgbClr val="166534"/>
+                  <a:srgbClr val="A5335F"/>
                 </a:solidFill>
                 <a:latin typeface="Verdana"/>
               </a:rPr>
@@ -9181,7 +9181,7 @@
             <a:r>
               <a:rPr sz="1300" b="1" i="0" spc="156">
                 <a:solidFill>
-                  <a:srgbClr val="166534"/>
+                  <a:srgbClr val="A5335F"/>
                 </a:solidFill>
                 <a:latin typeface="Verdana"/>
               </a:rPr>
@@ -9730,7 +9730,7 @@
             <a:r>
               <a:rPr sz="1300" b="1" i="0" spc="156">
                 <a:solidFill>
-                  <a:srgbClr val="166534"/>
+                  <a:srgbClr val="A5335F"/>
                 </a:solidFill>
                 <a:latin typeface="Verdana"/>
               </a:rPr>
@@ -9880,7 +9880,7 @@
             </a:avLst>
           </a:prstGeom>
           <a:solidFill>
-            <a:srgbClr val="E3F1E7"/>
+            <a:srgbClr val="FCE9F0"/>
           </a:solidFill>
           <a:ln>
             <a:noFill/>
@@ -9937,7 +9937,7 @@
             <a:r>
               <a:rPr sz="1500" b="1" i="0">
                 <a:solidFill>
-                  <a:srgbClr val="166534"/>
+                  <a:srgbClr val="A5335F"/>
                 </a:solidFill>
                 <a:latin typeface="Verdana"/>
               </a:rPr>
@@ -10048,7 +10048,7 @@
             </a:avLst>
           </a:prstGeom>
           <a:solidFill>
-            <a:srgbClr val="E3F1E7"/>
+            <a:srgbClr val="FCE9F0"/>
           </a:solidFill>
           <a:ln>
             <a:noFill/>
@@ -10105,7 +10105,7 @@
             <a:r>
               <a:rPr sz="1500" b="1" i="0">
                 <a:solidFill>
-                  <a:srgbClr val="166534"/>
+                  <a:srgbClr val="A5335F"/>
                 </a:solidFill>
                 <a:latin typeface="Verdana"/>
               </a:rPr>
@@ -10216,7 +10216,7 @@
             </a:avLst>
           </a:prstGeom>
           <a:solidFill>
-            <a:srgbClr val="E3F1E7"/>
+            <a:srgbClr val="FCE9F0"/>
           </a:solidFill>
           <a:ln>
             <a:noFill/>
@@ -10273,7 +10273,7 @@
             <a:r>
               <a:rPr sz="1500" b="1" i="0">
                 <a:solidFill>
-                  <a:srgbClr val="166534"/>
+                  <a:srgbClr val="A5335F"/>
                 </a:solidFill>
                 <a:latin typeface="Verdana"/>
               </a:rPr>
@@ -10489,7 +10489,7 @@
             <a:r>
               <a:rPr sz="1300" b="1" i="0" spc="156">
                 <a:solidFill>
-                  <a:srgbClr val="166534"/>
+                  <a:srgbClr val="A5335F"/>
                 </a:solidFill>
                 <a:latin typeface="Verdana"/>
               </a:rPr>
@@ -10639,7 +10639,7 @@
             </a:avLst>
           </a:prstGeom>
           <a:solidFill>
-            <a:srgbClr val="E3F1E7"/>
+            <a:srgbClr val="FCE9F0"/>
           </a:solidFill>
           <a:ln>
             <a:noFill/>
@@ -10696,7 +10696,7 @@
             <a:r>
               <a:rPr sz="1500" b="1" i="0">
                 <a:solidFill>
-                  <a:srgbClr val="166534"/>
+                  <a:srgbClr val="A5335F"/>
                 </a:solidFill>
                 <a:latin typeface="Verdana"/>
               </a:rPr>
@@ -10816,7 +10816,7 @@
             </a:avLst>
           </a:prstGeom>
           <a:solidFill>
-            <a:srgbClr val="E3F1E7"/>
+            <a:srgbClr val="FCE9F0"/>
           </a:solidFill>
           <a:ln>
             <a:noFill/>
@@ -10873,7 +10873,7 @@
             <a:r>
               <a:rPr sz="1500" b="1" i="0">
                 <a:solidFill>
-                  <a:srgbClr val="166534"/>
+                  <a:srgbClr val="A5335F"/>
                 </a:solidFill>
                 <a:latin typeface="Verdana"/>
               </a:rPr>
@@ -10993,7 +10993,7 @@
             </a:avLst>
           </a:prstGeom>
           <a:solidFill>
-            <a:srgbClr val="E3F1E7"/>
+            <a:srgbClr val="FCE9F0"/>
           </a:solidFill>
           <a:ln>
             <a:noFill/>
@@ -11050,7 +11050,7 @@
             <a:r>
               <a:rPr sz="1500" b="1" i="0">
                 <a:solidFill>
-                  <a:srgbClr val="166534"/>
+                  <a:srgbClr val="A5335F"/>
                 </a:solidFill>
                 <a:latin typeface="Verdana"/>
               </a:rPr>
@@ -11738,7 +11738,7 @@
             <a:r>
               <a:rPr sz="1300" b="1" i="0" spc="156">
                 <a:solidFill>
-                  <a:srgbClr val="166534"/>
+                  <a:srgbClr val="A5335F"/>
                 </a:solidFill>
                 <a:latin typeface="Verdana"/>
               </a:rPr>
@@ -11849,7 +11849,7 @@
             </a:avLst>
           </a:prstGeom>
           <a:solidFill>
-            <a:srgbClr val="E3F1E7"/>
+            <a:srgbClr val="FCE9F0"/>
           </a:solidFill>
           <a:ln>
             <a:noFill/>
@@ -11906,7 +11906,7 @@
             <a:r>
               <a:rPr sz="1500" b="1" i="0">
                 <a:solidFill>
-                  <a:srgbClr val="166534"/>
+                  <a:srgbClr val="A5335F"/>
                 </a:solidFill>
                 <a:latin typeface="Verdana"/>
               </a:rPr>
@@ -12017,7 +12017,7 @@
             </a:avLst>
           </a:prstGeom>
           <a:solidFill>
-            <a:srgbClr val="E3F1E7"/>
+            <a:srgbClr val="FCE9F0"/>
           </a:solidFill>
           <a:ln>
             <a:noFill/>
@@ -12074,7 +12074,7 @@
             <a:r>
               <a:rPr sz="1500" b="1" i="0">
                 <a:solidFill>
-                  <a:srgbClr val="166534"/>
+                  <a:srgbClr val="A5335F"/>
                 </a:solidFill>
                 <a:latin typeface="Verdana"/>
               </a:rPr>
@@ -12185,7 +12185,7 @@
             </a:avLst>
           </a:prstGeom>
           <a:solidFill>
-            <a:srgbClr val="E3F1E7"/>
+            <a:srgbClr val="FCE9F0"/>
           </a:solidFill>
           <a:ln>
             <a:noFill/>
@@ -12242,7 +12242,7 @@
             <a:r>
               <a:rPr sz="1500" b="1" i="0">
                 <a:solidFill>
-                  <a:srgbClr val="166534"/>
+                  <a:srgbClr val="A5335F"/>
                 </a:solidFill>
                 <a:latin typeface="Verdana"/>
               </a:rPr>
@@ -12353,7 +12353,7 @@
             </a:avLst>
           </a:prstGeom>
           <a:solidFill>
-            <a:srgbClr val="E3F1E7"/>
+            <a:srgbClr val="FCE9F0"/>
           </a:solidFill>
           <a:ln>
             <a:noFill/>
@@ -12410,7 +12410,7 @@
             <a:r>
               <a:rPr sz="1500" b="1" i="0">
                 <a:solidFill>
-                  <a:srgbClr val="166534"/>
+                  <a:srgbClr val="A5335F"/>
                 </a:solidFill>
                 <a:latin typeface="Verdana"/>
               </a:rPr>
@@ -12626,7 +12626,7 @@
             <a:r>
               <a:rPr sz="1300" b="1" i="0" spc="156">
                 <a:solidFill>
-                  <a:srgbClr val="166534"/>
+                  <a:srgbClr val="A5335F"/>
                 </a:solidFill>
                 <a:latin typeface="Verdana"/>
               </a:rPr>
@@ -12828,7 +12828,7 @@
             <a:r>
               <a:rPr sz="1800" b="1" i="0">
                 <a:solidFill>
-                  <a:srgbClr val="166534"/>
+                  <a:srgbClr val="A5335F"/>
                 </a:solidFill>
                 <a:latin typeface="Verdana"/>
               </a:rPr>
@@ -12948,7 +12948,7 @@
             <a:r>
               <a:rPr sz="1800" b="1" i="0">
                 <a:solidFill>
-                  <a:srgbClr val="166534"/>
+                  <a:srgbClr val="A5335F"/>
                 </a:solidFill>
                 <a:latin typeface="Verdana"/>
               </a:rPr>
@@ -13068,7 +13068,7 @@
             <a:r>
               <a:rPr sz="1800" b="1" i="0">
                 <a:solidFill>
-                  <a:srgbClr val="166534"/>
+                  <a:srgbClr val="A5335F"/>
                 </a:solidFill>
                 <a:latin typeface="Verdana"/>
               </a:rPr>
@@ -13188,7 +13188,7 @@
             <a:r>
               <a:rPr sz="1800" b="1" i="0">
                 <a:solidFill>
-                  <a:srgbClr val="166534"/>
+                  <a:srgbClr val="A5335F"/>
                 </a:solidFill>
                 <a:latin typeface="Verdana"/>
               </a:rPr>
@@ -13308,7 +13308,7 @@
             <a:r>
               <a:rPr sz="1800" b="1" i="0">
                 <a:solidFill>
-                  <a:srgbClr val="166534"/>
+                  <a:srgbClr val="A5335F"/>
                 </a:solidFill>
                 <a:latin typeface="Verdana"/>
               </a:rPr>
@@ -13428,7 +13428,7 @@
             <a:r>
               <a:rPr sz="1800" b="1" i="0">
                 <a:solidFill>
-                  <a:srgbClr val="166534"/>
+                  <a:srgbClr val="A5335F"/>
                 </a:solidFill>
                 <a:latin typeface="Verdana"/>
               </a:rPr>
@@ -13644,7 +13644,7 @@
             <a:r>
               <a:rPr sz="1300" b="1" i="0" spc="156">
                 <a:solidFill>
-                  <a:srgbClr val="166534"/>
+                  <a:srgbClr val="A5335F"/>
                 </a:solidFill>
                 <a:latin typeface="Verdana"/>
               </a:rPr>
@@ -13670,7 +13670,7 @@
             </a:avLst>
           </a:prstGeom>
           <a:solidFill>
-            <a:srgbClr val="E3F1E7"/>
+            <a:srgbClr val="FCE9F0"/>
           </a:solidFill>
           <a:ln w="12700">
             <a:solidFill>
@@ -13991,7 +13991,7 @@
             <a:r>
               <a:rPr sz="1300" b="1" i="0" spc="156">
                 <a:solidFill>
-                  <a:srgbClr val="166534"/>
+                  <a:srgbClr val="A5335F"/>
                 </a:solidFill>
                 <a:latin typeface="Verdana"/>
               </a:rPr>
@@ -14931,7 +14931,7 @@
             <a:r>
               <a:rPr sz="1300" b="1" i="0" spc="156">
                 <a:solidFill>
-                  <a:srgbClr val="166534"/>
+                  <a:srgbClr val="A5335F"/>
                 </a:solidFill>
                 <a:latin typeface="Verdana"/>
               </a:rPr>
@@ -15751,7 +15751,7 @@
             <a:r>
               <a:rPr sz="1300" b="1" i="0" spc="156">
                 <a:solidFill>
-                  <a:srgbClr val="166534"/>
+                  <a:srgbClr val="A5335F"/>
                 </a:solidFill>
                 <a:latin typeface="Verdana"/>
               </a:rPr>
@@ -15777,7 +15777,7 @@
             </a:avLst>
           </a:prstGeom>
           <a:solidFill>
-            <a:srgbClr val="E3F1E7"/>
+            <a:srgbClr val="FCE9F0"/>
           </a:solidFill>
           <a:ln w="12700">
             <a:solidFill>
@@ -16098,7 +16098,7 @@
             <a:r>
               <a:rPr sz="1300" b="1" i="0" spc="156">
                 <a:solidFill>
-                  <a:srgbClr val="166534"/>
+                  <a:srgbClr val="A5335F"/>
                 </a:solidFill>
                 <a:latin typeface="Verdana"/>
               </a:rPr>
@@ -16248,7 +16248,7 @@
             </a:avLst>
           </a:prstGeom>
           <a:solidFill>
-            <a:srgbClr val="E3F1E7"/>
+            <a:srgbClr val="FCE9F0"/>
           </a:solidFill>
           <a:ln>
             <a:noFill/>
@@ -16305,7 +16305,7 @@
             <a:r>
               <a:rPr sz="1500" b="1" i="0">
                 <a:solidFill>
-                  <a:srgbClr val="166534"/>
+                  <a:srgbClr val="A5335F"/>
                 </a:solidFill>
                 <a:latin typeface="Verdana"/>
               </a:rPr>
@@ -16416,7 +16416,7 @@
             </a:avLst>
           </a:prstGeom>
           <a:solidFill>
-            <a:srgbClr val="E3F1E7"/>
+            <a:srgbClr val="FCE9F0"/>
           </a:solidFill>
           <a:ln>
             <a:noFill/>
@@ -16473,7 +16473,7 @@
             <a:r>
               <a:rPr sz="1500" b="1" i="0">
                 <a:solidFill>
-                  <a:srgbClr val="166534"/>
+                  <a:srgbClr val="A5335F"/>
                 </a:solidFill>
                 <a:latin typeface="Verdana"/>
               </a:rPr>
@@ -16584,7 +16584,7 @@
             </a:avLst>
           </a:prstGeom>
           <a:solidFill>
-            <a:srgbClr val="E3F1E7"/>
+            <a:srgbClr val="FCE9F0"/>
           </a:solidFill>
           <a:ln>
             <a:noFill/>
@@ -16641,7 +16641,7 @@
             <a:r>
               <a:rPr sz="1500" b="1" i="0">
                 <a:solidFill>
-                  <a:srgbClr val="166534"/>
+                  <a:srgbClr val="A5335F"/>
                 </a:solidFill>
                 <a:latin typeface="Verdana"/>
               </a:rPr>
@@ -16752,7 +16752,7 @@
             </a:avLst>
           </a:prstGeom>
           <a:solidFill>
-            <a:srgbClr val="E3F1E7"/>
+            <a:srgbClr val="FCE9F0"/>
           </a:solidFill>
           <a:ln>
             <a:noFill/>
@@ -16809,7 +16809,7 @@
             <a:r>
               <a:rPr sz="1500" b="1" i="0">
                 <a:solidFill>
-                  <a:srgbClr val="166534"/>
+                  <a:srgbClr val="A5335F"/>
                 </a:solidFill>
                 <a:latin typeface="Verdana"/>
               </a:rPr>
@@ -16920,7 +16920,7 @@
             </a:avLst>
           </a:prstGeom>
           <a:solidFill>
-            <a:srgbClr val="E3F1E7"/>
+            <a:srgbClr val="FCE9F0"/>
           </a:solidFill>
           <a:ln>
             <a:noFill/>
@@ -16977,7 +16977,7 @@
             <a:r>
               <a:rPr sz="1500" b="1" i="0">
                 <a:solidFill>
-                  <a:srgbClr val="166534"/>
+                  <a:srgbClr val="A5335F"/>
                 </a:solidFill>
                 <a:latin typeface="Verdana"/>
               </a:rPr>
@@ -17193,7 +17193,7 @@
             <a:r>
               <a:rPr sz="1300" b="1" i="0" spc="156">
                 <a:solidFill>
-                  <a:srgbClr val="166534"/>
+                  <a:srgbClr val="A5335F"/>
                 </a:solidFill>
                 <a:latin typeface="Verdana"/>
               </a:rPr>
@@ -17343,7 +17343,7 @@
             </a:avLst>
           </a:prstGeom>
           <a:solidFill>
-            <a:srgbClr val="E3F1E7"/>
+            <a:srgbClr val="FCE9F0"/>
           </a:solidFill>
           <a:ln>
             <a:noFill/>
@@ -17400,7 +17400,7 @@
             <a:r>
               <a:rPr sz="1500" b="1" i="0">
                 <a:solidFill>
-                  <a:srgbClr val="166534"/>
+                  <a:srgbClr val="A5335F"/>
                 </a:solidFill>
                 <a:latin typeface="Verdana"/>
               </a:rPr>
@@ -17520,7 +17520,7 @@
             </a:avLst>
           </a:prstGeom>
           <a:solidFill>
-            <a:srgbClr val="E3F1E7"/>
+            <a:srgbClr val="FCE9F0"/>
           </a:solidFill>
           <a:ln>
             <a:noFill/>
@@ -17577,7 +17577,7 @@
             <a:r>
               <a:rPr sz="1500" b="1" i="0">
                 <a:solidFill>
-                  <a:srgbClr val="166534"/>
+                  <a:srgbClr val="A5335F"/>
                 </a:solidFill>
                 <a:latin typeface="Verdana"/>
               </a:rPr>
@@ -17697,7 +17697,7 @@
             </a:avLst>
           </a:prstGeom>
           <a:solidFill>
-            <a:srgbClr val="E3F1E7"/>
+            <a:srgbClr val="FCE9F0"/>
           </a:solidFill>
           <a:ln>
             <a:noFill/>
@@ -17754,7 +17754,7 @@
             <a:r>
               <a:rPr sz="1500" b="1" i="0">
                 <a:solidFill>
-                  <a:srgbClr val="166534"/>
+                  <a:srgbClr val="A5335F"/>
                 </a:solidFill>
                 <a:latin typeface="Verdana"/>
               </a:rPr>
@@ -17874,7 +17874,7 @@
             </a:avLst>
           </a:prstGeom>
           <a:solidFill>
-            <a:srgbClr val="E3F1E7"/>
+            <a:srgbClr val="FCE9F0"/>
           </a:solidFill>
           <a:ln>
             <a:noFill/>
@@ -17931,7 +17931,7 @@
             <a:r>
               <a:rPr sz="1500" b="1" i="0">
                 <a:solidFill>
-                  <a:srgbClr val="166534"/>
+                  <a:srgbClr val="A5335F"/>
                 </a:solidFill>
                 <a:latin typeface="Verdana"/>
               </a:rPr>
@@ -18051,7 +18051,7 @@
             </a:avLst>
           </a:prstGeom>
           <a:solidFill>
-            <a:srgbClr val="E3F1E7"/>
+            <a:srgbClr val="FCE9F0"/>
           </a:solidFill>
           <a:ln>
             <a:noFill/>
@@ -18108,7 +18108,7 @@
             <a:r>
               <a:rPr sz="1500" b="1" i="0">
                 <a:solidFill>
-                  <a:srgbClr val="166534"/>
+                  <a:srgbClr val="A5335F"/>
                 </a:solidFill>
                 <a:latin typeface="Verdana"/>
               </a:rPr>
